--- a/decks/maths-algebra/maths-algebra_ch4_two-step-machines.pptx
+++ b/decks/maths-algebra/maths-algebra_ch4_two-step-machines.pptx
@@ -121,47 +121,47 @@
   <p:extLst>
     <p:ext uri="{521415D9-36F7-43E2-AB2F-B90AF26B5E84}">
       <p14:sectionLst xmlns:p14="http://schemas.microsoft.com/office/powerpoint/2010/main">
-        <p14:section name="Opening" id="{6dfb36c3-4254-9c15-247c-d4e1d19f316b}">
+        <p14:section name="Opening" id="{4f8546be-23df-6894-de1a-e05f56416d87}">
           <p14:sldIdLst>
             <p14:sldId id="256"/>
           </p14:sldIdLst>
         </p14:section>
-        <p14:section name="Gate" id="{a070cfbb-92b4-1cf9-7fc2-d1f93aac476f}">
+        <p14:section name="Gate" id="{27842f73-b3be-8a8a-7118-774c108aae82}">
           <p14:sldIdLst>
             <p14:sldId id="257"/>
             <p14:sldId id="258"/>
           </p14:sldIdLst>
         </p14:section>
-        <p14:section name="Pre-teach" id="{df0cc871-1fc5-4ef6-5b2a-b8fb9d5291b2}">
+        <p14:section name="Pre-teach" id="{4d28acf6-83d7-1bd9-05f4-17dd5a4ed90a}">
           <p14:sldIdLst>
             <p14:sldId id="259"/>
           </p14:sldIdLst>
         </p14:section>
-        <p14:section name="Read-along" id="{3da96018-e85c-b120-4795-5ed64637b2f2}">
+        <p14:section name="Read-along" id="{a0f09abc-8048-7296-7fca-ec282c26da04}">
           <p14:sldIdLst>
             <p14:sldId id="260"/>
             <p14:sldId id="261"/>
           </p14:sldIdLst>
         </p14:section>
-        <p14:section name="Teach" id="{f5f96a3a-00b2-23ad-ee90-dab9dcc7420b}">
+        <p14:section name="Teach" id="{7d712a63-5e3b-d792-e63e-f8683d6fd10e}">
           <p14:sldIdLst>
             <p14:sldId id="262"/>
             <p14:sldId id="263"/>
             <p14:sldId id="264"/>
           </p14:sldIdLst>
         </p14:section>
-        <p14:section name="Routes" id="{6200c7e3-01de-5dd3-cc08-d9e6b7f4d8f6}">
+        <p14:section name="Routes" id="{2c620f9e-da72-8aae-14c8-f9bbd45a17d8}">
           <p14:sldIdLst>
             <p14:sldId id="265"/>
             <p14:sldId id="266"/>
           </p14:sldIdLst>
         </p14:section>
-        <p14:section name="Close" id="{b87a6fce-3c46-b42b-587e-f059b3f4458b}">
+        <p14:section name="Close" id="{c2a3c247-ca9a-b8a2-ed11-bc07d9f1e62f}">
           <p14:sldIdLst>
             <p14:sldId id="267"/>
           </p14:sldIdLst>
         </p14:section>
-        <p14:section name="Answers" id="{233aeae7-911c-75db-5044-456642290924}">
+        <p14:section name="Answers" id="{5d30cac5-cc7d-7e8a-6004-91ac3e5333be}">
           <p14:sldIdLst>
             <p14:sldId id="268"/>
             <p14:sldId id="269"/>
@@ -1035,7 +1035,7 @@
             <a:r>
               <a:rPr lang="en-US" dirty="0"/>
               <a:t>Answers — task 2: Write the expression. Reveal the answer; pupils mark their own work in a different colour, then read the "why" together. Same destination for every lane, so one answer serves the whole class.
-Answer: A   5d + 8
+Answer: D   5d + 8
 Why: The first function turns d into 5d. The second adds 8 on the end: 5d + 8.
 Ask a Support pupil to explain one step, and a Stretch pupil to share their extension.</a:t>
             </a:r>
@@ -1218,7 +1218,7 @@
               <a:rPr lang="en-US" dirty="0"/>
               <a:t>Do now — retrieval. Silent, no notes, no help: recall comes before any support. Give about four minutes.
 1. A machine divides by 5, then adds 7. The input is 30. What is the output?  →  13
-2. A machine subtracts 4, then multiplies by 3. The input is c. What is the output?  →  B   3(c − 4)
+2. A machine subtracts 4, then multiplies by 3. The input is c. What is the output?  →  A   3(c − 4)
 3. To find the input of a two-step machine, undo the ___ function first.  →  second
 Circulate: who gets 3/3 (Stretch route), 2/3 (Core), 0–1 (Support)? Use this to route pupils later in the lesson.</a:t>
             </a:r>
@@ -1310,7 +1310,7 @@
               <a:rPr lang="en-US" dirty="0"/>
               <a:t>Answers — pupils mark their own in a different colour, then hands up for 3/3, 2/3, 1/3.
 1. 13. 30 ÷ 5 = 6, then 6 + 7 = 13.
-2. B   3(c − 4). After the first step you have c − 4. The second step multiplies all of it by 3, so brackets are needed: 3(c − 4).
+2. A   3(c − 4). After the first step you have c − 4. The second step multiplies all of it by 3, so brackets are needed: 3(c − 4).
 3. second. Work backwards from the output: undo the second function first, then the first.
 Say the route each score points to: 3/3 Stretch, 2/3 Core, 0–1 Support. Pupils may choose to move up.</a:t>
             </a:r>
@@ -4891,7 +4891,7 @@
                 <a:ea typeface="Calibri" pitchFamily="34" charset="-122"/>
                 <a:cs typeface="Calibri" pitchFamily="34" charset="-120"/>
               </a:rPr>
-              <a:t>5d + 8      </a:t>
+              <a:t>13d      </a:t>
             </a:r>
             <a:pPr algn="ctr" indent="0" marL="0">
               <a:buNone/>
@@ -4947,7 +4947,7 @@
                 <a:ea typeface="Calibri" pitchFamily="34" charset="-122"/>
                 <a:cs typeface="Calibri" pitchFamily="34" charset="-120"/>
               </a:rPr>
-              <a:t>13d      </a:t>
+              <a:t>d + 40      </a:t>
             </a:r>
             <a:pPr algn="ctr" indent="0" marL="0">
               <a:buNone/>
@@ -4975,7 +4975,7 @@
                 <a:ea typeface="Calibri" pitchFamily="34" charset="-122"/>
                 <a:cs typeface="Calibri" pitchFamily="34" charset="-120"/>
               </a:rPr>
-              <a:t>d + 40</a:t>
+              <a:t>5d + 8</a:t>
             </a:r>
             <a:endParaRPr lang="en-US" sz="2000" dirty="0"/>
           </a:p>
@@ -6829,7 +6829,7 @@
                 <a:ea typeface="Cambria" pitchFamily="34" charset="-122"/>
                 <a:cs typeface="Cambria" pitchFamily="34" charset="-120"/>
               </a:rPr>
-              <a:t>A   5d + 8</a:t>
+              <a:t>D   5d + 8</a:t>
             </a:r>
             <a:endParaRPr lang="en-US" sz="1800" dirty="0"/>
           </a:p>
@@ -8020,7 +8020,7 @@
                 <a:ea typeface="Calibri" pitchFamily="34" charset="-122"/>
                 <a:cs typeface="Calibri" pitchFamily="34" charset="-120"/>
               </a:rPr>
-              <a:t>3c − 4</a:t>
+              <a:t>3(c − 4)</a:t>
             </a:r>
             <a:endParaRPr lang="en-US" sz="2400" dirty="0"/>
           </a:p>
@@ -8057,7 +8057,7 @@
                 <a:ea typeface="Calibri" pitchFamily="34" charset="-122"/>
                 <a:cs typeface="Calibri" pitchFamily="34" charset="-120"/>
               </a:rPr>
-              <a:t>3(c − 4)</a:t>
+              <a:t>3c − 4</a:t>
             </a:r>
             <a:endParaRPr lang="en-US" sz="2400" dirty="0"/>
           </a:p>
@@ -8980,7 +8980,7 @@
                 <a:ea typeface="Calibri" pitchFamily="34" charset="-122"/>
                 <a:cs typeface="Calibri" pitchFamily="34" charset="-120"/>
               </a:rPr>
-              <a:t>B   3(c − 4)</a:t>
+              <a:t>A   3(c − 4)</a:t>
             </a:r>
             <a:endParaRPr lang="en-US" sz="2200" dirty="0"/>
           </a:p>

--- a/decks/maths-algebra/maths-algebra_ch4_two-step-machines.pptx
+++ b/decks/maths-algebra/maths-algebra_ch4_two-step-machines.pptx
@@ -121,47 +121,47 @@
   <p:extLst>
     <p:ext uri="{521415D9-36F7-43E2-AB2F-B90AF26B5E84}">
       <p14:sectionLst xmlns:p14="http://schemas.microsoft.com/office/powerpoint/2010/main">
-        <p14:section name="Opening" id="{4f8546be-23df-6894-de1a-e05f56416d87}">
+        <p14:section name="Opening" id="{c5f5e154-bae1-9e27-f79a-909c31699d15}">
           <p14:sldIdLst>
             <p14:sldId id="256"/>
           </p14:sldIdLst>
         </p14:section>
-        <p14:section name="Gate" id="{27842f73-b3be-8a8a-7118-774c108aae82}">
+        <p14:section name="Gate" id="{ffdde14a-3b45-99b7-ab21-ec99798cd11a}">
           <p14:sldIdLst>
             <p14:sldId id="257"/>
             <p14:sldId id="258"/>
           </p14:sldIdLst>
         </p14:section>
-        <p14:section name="Pre-teach" id="{4d28acf6-83d7-1bd9-05f4-17dd5a4ed90a}">
+        <p14:section name="Pre-teach" id="{5e0b3cd9-4029-4567-80a2-015f0007af27}">
           <p14:sldIdLst>
             <p14:sldId id="259"/>
           </p14:sldIdLst>
         </p14:section>
-        <p14:section name="Read-along" id="{a0f09abc-8048-7296-7fca-ec282c26da04}">
+        <p14:section name="Read-along" id="{a647efc7-9d65-19ab-1a33-936602453d51}">
           <p14:sldIdLst>
             <p14:sldId id="260"/>
             <p14:sldId id="261"/>
           </p14:sldIdLst>
         </p14:section>
-        <p14:section name="Teach" id="{7d712a63-5e3b-d792-e63e-f8683d6fd10e}">
+        <p14:section name="Teach" id="{0877b71d-11b4-5c82-e069-eadb00678341}">
           <p14:sldIdLst>
             <p14:sldId id="262"/>
             <p14:sldId id="263"/>
             <p14:sldId id="264"/>
           </p14:sldIdLst>
         </p14:section>
-        <p14:section name="Routes" id="{2c620f9e-da72-8aae-14c8-f9bbd45a17d8}">
+        <p14:section name="Routes" id="{03491950-eeff-c2df-04b7-c7ce3d6f68b4}">
           <p14:sldIdLst>
             <p14:sldId id="265"/>
             <p14:sldId id="266"/>
           </p14:sldIdLst>
         </p14:section>
-        <p14:section name="Close" id="{c2a3c247-ca9a-b8a2-ed11-bc07d9f1e62f}">
+        <p14:section name="Close" id="{1f21ab5a-f24c-9580-691a-68b852c7d8f6}">
           <p14:sldIdLst>
             <p14:sldId id="267"/>
           </p14:sldIdLst>
         </p14:section>
-        <p14:section name="Answers" id="{5d30cac5-cc7d-7e8a-6004-91ac3e5333be}">
+        <p14:section name="Answers" id="{7f1497ce-6d33-d7fe-a47e-26138ce13d32}">
           <p14:sldIdLst>
             <p14:sldId id="268"/>
             <p14:sldId id="269"/>
